--- a/CI-CD-Demo.pptx
+++ b/CI-CD-Demo.pptx
@@ -3363,246 +3363,418 @@
         </p:nvSpPr>
         <p:spPr>
           <a:xfrm>
-            <a:off x="710184" y="271971"/>
-            <a:ext cx="9144000" cy="804760"/>
+            <a:off x="710184" y="226251"/>
+            <a:ext cx="10143744" cy="804760"/>
           </a:xfrm>
         </p:spPr>
         <p:txBody>
           <a:bodyPr>
-            <a:normAutofit/>
+            <a:normAutofit fontScale="90000"/>
           </a:bodyPr>
           <a:lstStyle/>
           <a:p>
             <a:pPr algn="l"/>
             <a:r>
-              <a:rPr lang="fr-FR" sz="3000" dirty="0"/>
-              <a:t>CI/CD Enablement &amp; Multi-</a:t>
-            </a:r>
-            <a:r>
-              <a:rPr lang="fr-FR" sz="3000" dirty="0" err="1"/>
-              <a:t>Environment</a:t>
-            </a:r>
-            <a:r>
-              <a:rPr lang="fr-FR" sz="3000" dirty="0"/>
-              <a:t> Setup</a:t>
+              <a:rPr lang="en-IN" sz="3200" dirty="0"/>
+              <a:t>Multi-Environment Setup &amp; SageMaker Pipeline Migration Status</a:t>
             </a:r>
             <a:endParaRPr lang="en-IN" sz="3000" dirty="0"/>
           </a:p>
         </p:txBody>
       </p:sp>
-      <p:sp>
-        <p:nvSpPr>
-          <p:cNvPr id="3" name="Subtitle 2">
-            <a:extLst>
-              <a:ext uri="{FF2B5EF4-FFF2-40B4-BE49-F238E27FC236}">
-                <a16:creationId xmlns:a16="http://schemas.microsoft.com/office/drawing/2014/main" id="{6075E65C-9787-C7DB-16DA-0FA37DA65151}"/>
-              </a:ext>
-            </a:extLst>
-          </p:cNvPr>
-          <p:cNvSpPr>
-            <a:spLocks noGrp="1"/>
-          </p:cNvSpPr>
-          <p:nvPr>
-            <p:ph type="subTitle" idx="1"/>
-          </p:nvPr>
-        </p:nvSpPr>
-        <p:spPr>
-          <a:xfrm>
-            <a:off x="819912" y="1352614"/>
-            <a:ext cx="9144000" cy="4325810"/>
-          </a:xfrm>
-        </p:spPr>
-        <p:txBody>
-          <a:bodyPr>
-            <a:normAutofit fontScale="85000" lnSpcReduction="20000"/>
-          </a:bodyPr>
-          <a:lstStyle/>
-          <a:p>
-            <a:pPr algn="l"/>
-            <a:r>
-              <a:rPr lang="en-IN" b="1" dirty="0"/>
-              <a:t>What we implemented:</a:t>
-            </a:r>
-            <a:endParaRPr lang="en-IN" dirty="0"/>
-          </a:p>
-          <a:p>
-            <a:pPr marL="342900" indent="-342900" algn="l">
-              <a:buFont typeface="Arial" panose="020B0604020202020204" pitchFamily="34" charset="0"/>
-              <a:buChar char="•"/>
-            </a:pPr>
-            <a:r>
-              <a:rPr lang="en-IN" dirty="0"/>
-              <a:t>Setup </a:t>
-            </a:r>
-            <a:r>
-              <a:rPr lang="en-IN" b="1" dirty="0"/>
-              <a:t>Dev, UAT, Prod environments</a:t>
-            </a:r>
-            <a:r>
-              <a:rPr lang="en-IN" dirty="0"/>
-              <a:t> for ML/AI workloads</a:t>
-            </a:r>
-          </a:p>
-          <a:p>
-            <a:pPr marL="342900" indent="-342900" algn="l">
-              <a:buFont typeface="Arial" panose="020B0604020202020204" pitchFamily="34" charset="0"/>
-              <a:buChar char="•"/>
-            </a:pPr>
-            <a:r>
-              <a:rPr lang="en-IN" dirty="0"/>
-              <a:t>Built </a:t>
-            </a:r>
-            <a:r>
-              <a:rPr lang="en-IN" b="1" dirty="0"/>
-              <a:t>GitHub Actions CI/CD pipeline</a:t>
-            </a:r>
-            <a:r>
-              <a:rPr lang="en-IN" dirty="0"/>
-              <a:t> (build → test → deploy)</a:t>
-            </a:r>
-          </a:p>
-          <a:p>
-            <a:pPr marL="342900" indent="-342900" algn="l">
-              <a:buFont typeface="Arial" panose="020B0604020202020204" pitchFamily="34" charset="0"/>
-              <a:buChar char="•"/>
-            </a:pPr>
-            <a:r>
-              <a:rPr lang="en-IN" dirty="0"/>
-              <a:t>Enabled </a:t>
-            </a:r>
-            <a:r>
-              <a:rPr lang="en-IN" b="1" dirty="0"/>
-              <a:t>Git-based version control</a:t>
-            </a:r>
-            <a:r>
-              <a:rPr lang="en-IN" dirty="0"/>
-              <a:t>:</a:t>
-            </a:r>
-          </a:p>
-          <a:p>
-            <a:pPr marL="800100" lvl="1" indent="-342900" algn="l">
-              <a:buFont typeface="Arial" panose="020B0604020202020204" pitchFamily="34" charset="0"/>
-              <a:buChar char="•"/>
-            </a:pPr>
-            <a:r>
-              <a:rPr lang="en-IN" dirty="0"/>
-              <a:t>Branching strategy (dev → </a:t>
-            </a:r>
-            <a:r>
-              <a:rPr lang="en-IN" dirty="0" err="1"/>
-              <a:t>uat</a:t>
-            </a:r>
-            <a:r>
-              <a:rPr lang="en-IN" dirty="0"/>
-              <a:t> → prod)</a:t>
-            </a:r>
-          </a:p>
-          <a:p>
-            <a:pPr marL="800100" lvl="1" indent="-342900" algn="l">
-              <a:buFont typeface="Arial" panose="020B0604020202020204" pitchFamily="34" charset="0"/>
-              <a:buChar char="•"/>
-            </a:pPr>
-            <a:r>
-              <a:rPr lang="en-IN" dirty="0"/>
-              <a:t>Change traceability &amp; rollback support</a:t>
-            </a:r>
-          </a:p>
-          <a:p>
-            <a:pPr marL="800100" lvl="1" indent="-342900" algn="l">
-              <a:buFont typeface="Arial" panose="020B0604020202020204" pitchFamily="34" charset="0"/>
-              <a:buChar char="•"/>
-            </a:pPr>
-            <a:endParaRPr lang="en-IN" dirty="0"/>
-          </a:p>
-          <a:p>
-            <a:pPr marL="342900" indent="-342900" algn="l">
-              <a:buFont typeface="Arial" panose="020B0604020202020204" pitchFamily="34" charset="0"/>
-              <a:buChar char="•"/>
-            </a:pPr>
-            <a:r>
-              <a:rPr lang="en-IN" dirty="0"/>
-              <a:t>Integrated </a:t>
-            </a:r>
-            <a:r>
-              <a:rPr lang="en-IN" b="1" dirty="0"/>
-              <a:t>automated testing</a:t>
-            </a:r>
-            <a:r>
-              <a:rPr lang="en-IN" dirty="0"/>
-              <a:t>:</a:t>
-            </a:r>
-          </a:p>
-          <a:p>
-            <a:pPr marL="800100" lvl="1" indent="-342900" algn="l">
-              <a:buFont typeface="Arial" panose="020B0604020202020204" pitchFamily="34" charset="0"/>
-              <a:buChar char="•"/>
-            </a:pPr>
-            <a:r>
-              <a:rPr lang="en-IN" dirty="0"/>
-              <a:t>Unit tests</a:t>
-            </a:r>
-          </a:p>
-          <a:p>
-            <a:pPr marL="800100" lvl="1" indent="-342900" algn="l">
-              <a:buFont typeface="Arial" panose="020B0604020202020204" pitchFamily="34" charset="0"/>
-              <a:buChar char="•"/>
-            </a:pPr>
-            <a:r>
-              <a:rPr lang="en-IN" dirty="0"/>
-              <a:t>Integration tests</a:t>
-            </a:r>
-          </a:p>
-          <a:p>
-            <a:pPr algn="l"/>
-            <a:r>
-              <a:rPr lang="en-IN" b="1" dirty="0"/>
-              <a:t>Key Outcomes:</a:t>
-            </a:r>
-            <a:endParaRPr lang="en-IN" dirty="0"/>
-          </a:p>
-          <a:p>
-            <a:pPr marL="342900" indent="-342900" algn="l">
-              <a:buFont typeface="Arial" panose="020B0604020202020204" pitchFamily="34" charset="0"/>
-              <a:buChar char="•"/>
-            </a:pPr>
-            <a:r>
-              <a:rPr lang="en-IN" b="1" dirty="0"/>
-              <a:t>Consistent &amp; repeatable deployments</a:t>
-            </a:r>
-            <a:endParaRPr lang="en-IN" dirty="0"/>
-          </a:p>
-          <a:p>
-            <a:pPr marL="342900" indent="-342900" algn="l">
-              <a:buFont typeface="Arial" panose="020B0604020202020204" pitchFamily="34" charset="0"/>
-              <a:buChar char="•"/>
-            </a:pPr>
-            <a:r>
-              <a:rPr lang="en-IN" dirty="0"/>
-              <a:t>Improved </a:t>
-            </a:r>
-            <a:r>
-              <a:rPr lang="en-IN" b="1" dirty="0"/>
-              <a:t>code quality via automated validation</a:t>
-            </a:r>
-            <a:endParaRPr lang="en-IN" dirty="0"/>
-          </a:p>
-          <a:p>
-            <a:pPr marL="342900" indent="-342900" algn="l">
-              <a:buFont typeface="Arial" panose="020B0604020202020204" pitchFamily="34" charset="0"/>
-              <a:buChar char="•"/>
-            </a:pPr>
-            <a:r>
-              <a:rPr lang="en-IN" b="1" dirty="0"/>
-              <a:t>Faster rollback &amp; release standardization</a:t>
-            </a:r>
-            <a:endParaRPr lang="en-IN" dirty="0"/>
-          </a:p>
-          <a:p>
-            <a:pPr algn="l"/>
-            <a:endParaRPr lang="en-IN" sz="1600" dirty="0"/>
-          </a:p>
-        </p:txBody>
-      </p:sp>
+      <p:graphicFrame>
+        <p:nvGraphicFramePr>
+          <p:cNvPr id="6" name="Table 5">
+            <a:extLst>
+              <a:ext uri="{FF2B5EF4-FFF2-40B4-BE49-F238E27FC236}">
+                <a16:creationId xmlns:a16="http://schemas.microsoft.com/office/drawing/2014/main" id="{BF927A73-FB83-FB01-6BD2-B011BDF1002E}"/>
+              </a:ext>
+            </a:extLst>
+          </p:cNvPr>
+          <p:cNvGraphicFramePr>
+            <a:graphicFrameLocks noGrp="1"/>
+          </p:cNvGraphicFramePr>
+          <p:nvPr>
+            <p:extLst>
+              <p:ext uri="{D42A27DB-BD31-4B8C-83A1-F6EECF244321}">
+                <p14:modId xmlns:p14="http://schemas.microsoft.com/office/powerpoint/2010/main" val="3469279186"/>
+              </p:ext>
+            </p:extLst>
+          </p:nvPr>
+        </p:nvGraphicFramePr>
+        <p:xfrm>
+          <a:off x="779272" y="1275594"/>
+          <a:ext cx="10074656" cy="4758989"/>
+        </p:xfrm>
+        <a:graphic>
+          <a:graphicData uri="http://schemas.openxmlformats.org/drawingml/2006/table">
+            <a:tbl>
+              <a:tblPr firstRow="1" bandRow="1">
+                <a:tableStyleId>{5C22544A-7EE6-4342-B048-85BDC9FD1C3A}</a:tableStyleId>
+              </a:tblPr>
+              <a:tblGrid>
+                <a:gridCol w="2722880">
+                  <a:extLst>
+                    <a:ext uri="{9D8B030D-6E8A-4147-A177-3AD203B41FA5}">
+                      <a16:colId xmlns:a16="http://schemas.microsoft.com/office/drawing/2014/main" val="3677458996"/>
+                    </a:ext>
+                  </a:extLst>
+                </a:gridCol>
+                <a:gridCol w="7351776">
+                  <a:extLst>
+                    <a:ext uri="{9D8B030D-6E8A-4147-A177-3AD203B41FA5}">
+                      <a16:colId xmlns:a16="http://schemas.microsoft.com/office/drawing/2014/main" val="3326302558"/>
+                    </a:ext>
+                  </a:extLst>
+                </a:gridCol>
+              </a:tblGrid>
+              <a:tr h="280871">
+                <a:tc>
+                  <a:txBody>
+                    <a:bodyPr/>
+                    <a:lstStyle/>
+                    <a:p>
+                      <a:pPr>
+                        <a:buNone/>
+                      </a:pPr>
+                      <a:r>
+                        <a:rPr lang="en-IN" sz="1600" b="1" dirty="0"/>
+                        <a:t>Capability</a:t>
+                      </a:r>
+                      <a:endParaRPr lang="en-IN" sz="1600" dirty="0"/>
+                    </a:p>
+                  </a:txBody>
+                  <a:tcPr anchor="ctr"/>
+                </a:tc>
+                <a:tc>
+                  <a:txBody>
+                    <a:bodyPr/>
+                    <a:lstStyle/>
+                    <a:p>
+                      <a:pPr>
+                        <a:buNone/>
+                      </a:pPr>
+                      <a:r>
+                        <a:rPr lang="en-IN" sz="1600" b="1"/>
+                        <a:t>Details</a:t>
+                      </a:r>
+                      <a:endParaRPr lang="en-IN" sz="1600"/>
+                    </a:p>
+                  </a:txBody>
+                  <a:tcPr anchor="ctr"/>
+                </a:tc>
+                <a:extLst>
+                  <a:ext uri="{0D108BD9-81ED-4DB2-BD59-A6C34878D82A}">
+                    <a16:rowId xmlns:a16="http://schemas.microsoft.com/office/drawing/2014/main" val="3778092098"/>
+                  </a:ext>
+                </a:extLst>
+              </a:tr>
+              <a:tr h="702176">
+                <a:tc>
+                  <a:txBody>
+                    <a:bodyPr/>
+                    <a:lstStyle/>
+                    <a:p>
+                      <a:pPr>
+                        <a:buNone/>
+                      </a:pPr>
+                      <a:r>
+                        <a:rPr lang="en-IN" sz="1600" b="1" dirty="0"/>
+                        <a:t>Current Status</a:t>
+                      </a:r>
+                      <a:endParaRPr lang="en-IN" sz="1600" dirty="0"/>
+                    </a:p>
+                  </a:txBody>
+                  <a:tcPr anchor="ctr"/>
+                </a:tc>
+                <a:tc>
+                  <a:txBody>
+                    <a:bodyPr/>
+                    <a:lstStyle/>
+                    <a:p>
+                      <a:pPr>
+                        <a:buNone/>
+                      </a:pPr>
+                      <a:r>
+                        <a:rPr lang="en-US" sz="1600" dirty="0"/>
+                        <a:t>Multi-environment AWS setup (</a:t>
+                      </a:r>
+                      <a:r>
+                        <a:rPr lang="en-US" sz="1600" b="1" dirty="0"/>
+                        <a:t>Dev, UAT, Prod</a:t>
+                      </a:r>
+                      <a:r>
+                        <a:rPr lang="en-US" sz="1600" dirty="0"/>
+                        <a:t>) is fully established and operational</a:t>
+                      </a:r>
+                    </a:p>
+                  </a:txBody>
+                  <a:tcPr anchor="ctr"/>
+                </a:tc>
+                <a:extLst>
+                  <a:ext uri="{0D108BD9-81ED-4DB2-BD59-A6C34878D82A}">
+                    <a16:rowId xmlns:a16="http://schemas.microsoft.com/office/drawing/2014/main" val="56501946"/>
+                  </a:ext>
+                </a:extLst>
+              </a:tr>
+              <a:tr h="702176">
+                <a:tc>
+                  <a:txBody>
+                    <a:bodyPr/>
+                    <a:lstStyle/>
+                    <a:p>
+                      <a:pPr>
+                        <a:buNone/>
+                      </a:pPr>
+                      <a:r>
+                        <a:rPr lang="en-IN" sz="1600" b="1" dirty="0"/>
+                        <a:t>CI/CD Implementation</a:t>
+                      </a:r>
+                      <a:endParaRPr lang="en-IN" sz="1600" dirty="0"/>
+                    </a:p>
+                  </a:txBody>
+                  <a:tcPr anchor="ctr"/>
+                </a:tc>
+                <a:tc>
+                  <a:txBody>
+                    <a:bodyPr/>
+                    <a:lstStyle/>
+                    <a:p>
+                      <a:pPr>
+                        <a:buNone/>
+                      </a:pPr>
+                      <a:r>
+                        <a:rPr lang="en-US" sz="1600" dirty="0"/>
+                        <a:t>All deployments are automated via </a:t>
+                      </a:r>
+                      <a:r>
+                        <a:rPr lang="en-US" sz="1600" b="1" dirty="0"/>
+                        <a:t>GitHub Actions CI/CD pipelines</a:t>
+                      </a:r>
+                      <a:r>
+                        <a:rPr lang="en-US" sz="1600" dirty="0"/>
+                        <a:t> (build → test → deploy)</a:t>
+                      </a:r>
+                    </a:p>
+                  </a:txBody>
+                  <a:tcPr anchor="ctr"/>
+                </a:tc>
+                <a:extLst>
+                  <a:ext uri="{0D108BD9-81ED-4DB2-BD59-A6C34878D82A}">
+                    <a16:rowId xmlns:a16="http://schemas.microsoft.com/office/drawing/2014/main" val="2734671741"/>
+                  </a:ext>
+                </a:extLst>
+              </a:tr>
+              <a:tr h="702176">
+                <a:tc>
+                  <a:txBody>
+                    <a:bodyPr/>
+                    <a:lstStyle/>
+                    <a:p>
+                      <a:pPr>
+                        <a:buNone/>
+                      </a:pPr>
+                      <a:r>
+                        <a:rPr lang="en-IN" sz="1600" b="1" dirty="0"/>
+                        <a:t>Testing &amp; Quality Gates</a:t>
+                      </a:r>
+                      <a:endParaRPr lang="en-IN" sz="1600" dirty="0"/>
+                    </a:p>
+                  </a:txBody>
+                  <a:tcPr anchor="ctr"/>
+                </a:tc>
+                <a:tc>
+                  <a:txBody>
+                    <a:bodyPr/>
+                    <a:lstStyle/>
+                    <a:p>
+                      <a:pPr>
+                        <a:buNone/>
+                      </a:pPr>
+                      <a:r>
+                        <a:rPr lang="en-US" sz="1600" dirty="0"/>
+                        <a:t>Integrated </a:t>
+                      </a:r>
+                      <a:r>
+                        <a:rPr lang="en-US" sz="1600" b="1" dirty="0"/>
+                        <a:t>Unit Tests &amp; Integration Tests as CI checks, </a:t>
+                      </a:r>
+                      <a:r>
+                        <a:rPr lang="en-US" sz="1600" b="0" dirty="0"/>
+                        <a:t>enforced before code merge to ensure code quality.</a:t>
+                      </a:r>
+                    </a:p>
+                  </a:txBody>
+                  <a:tcPr anchor="ctr"/>
+                </a:tc>
+                <a:extLst>
+                  <a:ext uri="{0D108BD9-81ED-4DB2-BD59-A6C34878D82A}">
+                    <a16:rowId xmlns:a16="http://schemas.microsoft.com/office/drawing/2014/main" val="3146475129"/>
+                  </a:ext>
+                </a:extLst>
+              </a:tr>
+              <a:tr h="702176">
+                <a:tc>
+                  <a:txBody>
+                    <a:bodyPr/>
+                    <a:lstStyle/>
+                    <a:p>
+                      <a:pPr>
+                        <a:buNone/>
+                      </a:pPr>
+                      <a:r>
+                        <a:rPr lang="en-IN" sz="1600" b="1"/>
+                        <a:t>Approval Workflow</a:t>
+                      </a:r>
+                      <a:endParaRPr lang="en-IN" sz="1600"/>
+                    </a:p>
+                  </a:txBody>
+                  <a:tcPr anchor="ctr"/>
+                </a:tc>
+                <a:tc>
+                  <a:txBody>
+                    <a:bodyPr/>
+                    <a:lstStyle/>
+                    <a:p>
+                      <a:pPr>
+                        <a:buNone/>
+                      </a:pPr>
+                      <a:r>
+                        <a:rPr lang="en-US" sz="1600" b="1" dirty="0"/>
+                        <a:t>TechLink approval</a:t>
+                      </a:r>
+                      <a:r>
+                        <a:rPr lang="en-US" sz="1600" dirty="0"/>
+                        <a:t> implemented for controlled deployments to </a:t>
+                      </a:r>
+                      <a:r>
+                        <a:rPr lang="en-US" sz="1600" b="1" dirty="0"/>
+                        <a:t>UAT and Prod</a:t>
+                      </a:r>
+                      <a:endParaRPr lang="en-US" sz="1600" dirty="0"/>
+                    </a:p>
+                  </a:txBody>
+                  <a:tcPr anchor="ctr"/>
+                </a:tc>
+                <a:extLst>
+                  <a:ext uri="{0D108BD9-81ED-4DB2-BD59-A6C34878D82A}">
+                    <a16:rowId xmlns:a16="http://schemas.microsoft.com/office/drawing/2014/main" val="3352553990"/>
+                  </a:ext>
+                </a:extLst>
+              </a:tr>
+              <a:tr h="702176">
+                <a:tc>
+                  <a:txBody>
+                    <a:bodyPr/>
+                    <a:lstStyle/>
+                    <a:p>
+                      <a:pPr>
+                        <a:buNone/>
+                      </a:pPr>
+                      <a:r>
+                        <a:rPr lang="en-IN" sz="1600" b="1"/>
+                        <a:t>SageMaker Migration</a:t>
+                      </a:r>
+                      <a:endParaRPr lang="en-IN" sz="1600"/>
+                    </a:p>
+                  </a:txBody>
+                  <a:tcPr anchor="ctr"/>
+                </a:tc>
+                <a:tc>
+                  <a:txBody>
+                    <a:bodyPr/>
+                    <a:lstStyle/>
+                    <a:p>
+                      <a:pPr>
+                        <a:buNone/>
+                      </a:pPr>
+                      <a:r>
+                        <a:rPr lang="en-US" sz="1600" dirty="0"/>
+                        <a:t>Successfully migrated </a:t>
+                      </a:r>
+                      <a:r>
+                        <a:rPr lang="en-US" sz="1600" b="1" dirty="0"/>
+                        <a:t>all 7 SageMaker pipelines(AI,ML,DS)</a:t>
+                      </a:r>
+                      <a:r>
+                        <a:rPr lang="en-US" sz="1600" dirty="0"/>
+                        <a:t> from </a:t>
+                      </a:r>
+                      <a:r>
+                        <a:rPr lang="en-US" sz="1600" b="1" dirty="0"/>
+                        <a:t>RSH</a:t>
+                      </a:r>
+                      <a:r>
+                        <a:rPr lang="en-US" sz="1600" dirty="0"/>
+                        <a:t> account to </a:t>
+                      </a:r>
+                      <a:r>
+                        <a:rPr lang="en-US" sz="1600" b="1" dirty="0"/>
+                        <a:t>environment-specific AWS accounts (Dev, UAT and PRD)</a:t>
+                      </a:r>
+                      <a:endParaRPr lang="en-US" sz="1600" dirty="0"/>
+                    </a:p>
+                  </a:txBody>
+                  <a:tcPr anchor="ctr"/>
+                </a:tc>
+                <a:extLst>
+                  <a:ext uri="{0D108BD9-81ED-4DB2-BD59-A6C34878D82A}">
+                    <a16:rowId xmlns:a16="http://schemas.microsoft.com/office/drawing/2014/main" val="3402507394"/>
+                  </a:ext>
+                </a:extLst>
+              </a:tr>
+              <a:tr h="912829">
+                <a:tc>
+                  <a:txBody>
+                    <a:bodyPr/>
+                    <a:lstStyle/>
+                    <a:p>
+                      <a:pPr>
+                        <a:buNone/>
+                      </a:pPr>
+                      <a:r>
+                        <a:rPr lang="en-IN" sz="1600" b="1"/>
+                        <a:t>Deployment Model</a:t>
+                      </a:r>
+                      <a:endParaRPr lang="en-IN" sz="1600"/>
+                    </a:p>
+                  </a:txBody>
+                  <a:tcPr anchor="ctr"/>
+                </a:tc>
+                <a:tc>
+                  <a:txBody>
+                    <a:bodyPr/>
+                    <a:lstStyle/>
+                    <a:p>
+                      <a:pPr>
+                        <a:buNone/>
+                      </a:pPr>
+                      <a:r>
+                        <a:rPr lang="en-US" sz="1600" dirty="0"/>
+                        <a:t>Pipelines are now deployed independently across </a:t>
+                      </a:r>
+                      <a:r>
+                        <a:rPr lang="en-US" sz="1600" b="1" dirty="0"/>
+                        <a:t>Dev → UAT → PRD</a:t>
+                      </a:r>
+                      <a:r>
+                        <a:rPr lang="en-US" sz="1600" dirty="0"/>
+                        <a:t> with environment-specific configurations</a:t>
+                      </a:r>
+                    </a:p>
+                  </a:txBody>
+                  <a:tcPr anchor="ctr"/>
+                </a:tc>
+                <a:extLst>
+                  <a:ext uri="{0D108BD9-81ED-4DB2-BD59-A6C34878D82A}">
+                    <a16:rowId xmlns:a16="http://schemas.microsoft.com/office/drawing/2014/main" val="2957825096"/>
+                  </a:ext>
+                </a:extLst>
+              </a:tr>
+            </a:tbl>
+          </a:graphicData>
+        </a:graphic>
+      </p:graphicFrame>
     </p:spTree>
     <p:extLst>
       <p:ext uri="{BB962C8B-B14F-4D97-AF65-F5344CB8AC3E}">
@@ -3810,7 +3982,7 @@
         </p:nvSpPr>
         <p:spPr>
           <a:xfrm>
-            <a:off x="710184" y="271971"/>
+            <a:off x="627888" y="345123"/>
             <a:ext cx="9144000" cy="804760"/>
           </a:xfrm>
         </p:spPr>
@@ -3823,220 +3995,372 @@
             <a:pPr algn="l"/>
             <a:r>
               <a:rPr lang="en-IN" sz="3200" dirty="0"/>
-              <a:t>SageMaker Pipeline Migration (RSH → Multi-Env)</a:t>
+              <a:t>Outcome &amp; Benefits</a:t>
             </a:r>
             <a:endParaRPr lang="en-IN" sz="3000" dirty="0"/>
           </a:p>
         </p:txBody>
       </p:sp>
-      <p:sp>
-        <p:nvSpPr>
-          <p:cNvPr id="3" name="Subtitle 2">
-            <a:extLst>
-              <a:ext uri="{FF2B5EF4-FFF2-40B4-BE49-F238E27FC236}">
-                <a16:creationId xmlns:a16="http://schemas.microsoft.com/office/drawing/2014/main" id="{D576A73B-7C04-7C7B-5CF1-9261F385B425}"/>
-              </a:ext>
-            </a:extLst>
-          </p:cNvPr>
-          <p:cNvSpPr>
-            <a:spLocks noGrp="1"/>
-          </p:cNvSpPr>
-          <p:nvPr>
-            <p:ph type="subTitle" idx="1"/>
-          </p:nvPr>
-        </p:nvSpPr>
-        <p:spPr>
-          <a:xfrm>
-            <a:off x="819912" y="1590358"/>
-            <a:ext cx="9144000" cy="3832034"/>
-          </a:xfrm>
-        </p:spPr>
-        <p:txBody>
-          <a:bodyPr>
-            <a:normAutofit/>
-          </a:bodyPr>
-          <a:lstStyle/>
-          <a:p>
-            <a:pPr algn="l"/>
-            <a:r>
-              <a:rPr lang="en-IN" sz="2000" b="1" dirty="0"/>
-              <a:t>What we executed:</a:t>
-            </a:r>
-          </a:p>
-          <a:p>
-            <a:pPr marL="342900" lvl="0" indent="-342900" algn="l" eaLnBrk="0" fontAlgn="base" hangingPunct="0">
-              <a:lnSpc>
-                <a:spcPct val="100000"/>
-              </a:lnSpc>
-              <a:spcBef>
-                <a:spcPct val="0"/>
-              </a:spcBef>
-              <a:spcAft>
-                <a:spcPct val="0"/>
-              </a:spcAft>
-              <a:buFont typeface="Arial" panose="020B0604020202020204" pitchFamily="34" charset="0"/>
-              <a:buChar char="•"/>
-            </a:pPr>
-            <a:r>
-              <a:rPr lang="en-US" altLang="en-US" sz="2000" dirty="0">
-                <a:latin typeface="Arial" panose="020B0604020202020204" pitchFamily="34" charset="0"/>
-              </a:rPr>
-              <a:t>Migrated </a:t>
-            </a:r>
-            <a:r>
-              <a:rPr lang="en-US" altLang="en-US" sz="2000" b="1" dirty="0">
-                <a:latin typeface="Arial" panose="020B0604020202020204" pitchFamily="34" charset="0"/>
-              </a:rPr>
-              <a:t>all SageMaker pipelines from RSH account</a:t>
-            </a:r>
-            <a:endParaRPr lang="en-US" altLang="en-US" sz="2000" dirty="0">
-              <a:latin typeface="Arial" panose="020B0604020202020204" pitchFamily="34" charset="0"/>
-            </a:endParaRPr>
-          </a:p>
-          <a:p>
-            <a:pPr marL="342900" lvl="0" indent="-342900" algn="l" eaLnBrk="0" fontAlgn="base" hangingPunct="0">
-              <a:lnSpc>
-                <a:spcPct val="100000"/>
-              </a:lnSpc>
-              <a:spcBef>
-                <a:spcPct val="0"/>
-              </a:spcBef>
-              <a:spcAft>
-                <a:spcPct val="0"/>
-              </a:spcAft>
-              <a:buFont typeface="Arial" panose="020B0604020202020204" pitchFamily="34" charset="0"/>
-              <a:buChar char="•"/>
-            </a:pPr>
-            <a:r>
-              <a:rPr lang="en-US" altLang="en-US" sz="2000" dirty="0">
-                <a:latin typeface="Arial" panose="020B0604020202020204" pitchFamily="34" charset="0"/>
-              </a:rPr>
-              <a:t>Deployed into </a:t>
-            </a:r>
-            <a:r>
-              <a:rPr lang="en-US" altLang="en-US" sz="2000" b="1" dirty="0">
-                <a:latin typeface="Arial" panose="020B0604020202020204" pitchFamily="34" charset="0"/>
-              </a:rPr>
-              <a:t>Dev, UAT, Prod AWS accounts</a:t>
-            </a:r>
-            <a:endParaRPr lang="en-US" altLang="en-US" sz="2000" dirty="0">
-              <a:latin typeface="Arial" panose="020B0604020202020204" pitchFamily="34" charset="0"/>
-            </a:endParaRPr>
-          </a:p>
-          <a:p>
-            <a:pPr marL="342900" lvl="0" indent="-342900" algn="l" eaLnBrk="0" fontAlgn="base" hangingPunct="0">
-              <a:lnSpc>
-                <a:spcPct val="100000"/>
-              </a:lnSpc>
-              <a:spcBef>
-                <a:spcPct val="0"/>
-              </a:spcBef>
-              <a:spcAft>
-                <a:spcPct val="0"/>
-              </a:spcAft>
-              <a:buFont typeface="Arial" panose="020B0604020202020204" pitchFamily="34" charset="0"/>
-              <a:buChar char="•"/>
-            </a:pPr>
-            <a:r>
-              <a:rPr lang="en-US" altLang="en-US" sz="2000" dirty="0">
-                <a:latin typeface="Arial" panose="020B0604020202020204" pitchFamily="34" charset="0"/>
-              </a:rPr>
-              <a:t>Configured </a:t>
-            </a:r>
-            <a:r>
-              <a:rPr lang="en-US" altLang="en-US" sz="2000" b="1" dirty="0">
-                <a:latin typeface="Arial" panose="020B0604020202020204" pitchFamily="34" charset="0"/>
-              </a:rPr>
-              <a:t>env-specific parameters &amp; resources</a:t>
-            </a:r>
-          </a:p>
-          <a:p>
-            <a:pPr lvl="0" algn="l" eaLnBrk="0" fontAlgn="base" hangingPunct="0">
-              <a:lnSpc>
-                <a:spcPct val="100000"/>
-              </a:lnSpc>
-              <a:spcBef>
-                <a:spcPct val="0"/>
-              </a:spcBef>
-              <a:spcAft>
-                <a:spcPct val="0"/>
-              </a:spcAft>
-              <a:buFontTx/>
-              <a:buChar char="•"/>
-            </a:pPr>
-            <a:endParaRPr lang="en-US" sz="2000" b="1" dirty="0">
-              <a:latin typeface="Arial" panose="020B0604020202020204" pitchFamily="34" charset="0"/>
-            </a:endParaRPr>
-          </a:p>
-          <a:p>
-            <a:pPr algn="l"/>
-            <a:r>
-              <a:rPr lang="en-US" sz="2000" b="1" dirty="0"/>
-              <a:t>Key Outcomes:</a:t>
-            </a:r>
-            <a:endParaRPr lang="en-US" sz="2000" dirty="0"/>
-          </a:p>
-          <a:p>
-            <a:pPr marL="342900" indent="-342900" algn="l">
-              <a:buFont typeface="Arial" panose="020B0604020202020204" pitchFamily="34" charset="0"/>
-              <a:buChar char="•"/>
-            </a:pPr>
-            <a:r>
-              <a:rPr lang="en-US" sz="2000" b="1" dirty="0"/>
-              <a:t>Strong environment isolation &amp; governance</a:t>
-            </a:r>
-            <a:endParaRPr lang="en-US" sz="2000" dirty="0"/>
-          </a:p>
-          <a:p>
-            <a:pPr marL="342900" indent="-342900" algn="l">
-              <a:buFont typeface="Arial" panose="020B0604020202020204" pitchFamily="34" charset="0"/>
-              <a:buChar char="•"/>
-            </a:pPr>
-            <a:r>
-              <a:rPr lang="en-US" sz="2000" dirty="0"/>
-              <a:t>Improved </a:t>
-            </a:r>
-            <a:r>
-              <a:rPr lang="en-US" sz="2000" b="1" dirty="0"/>
-              <a:t>security (account-level segregation)</a:t>
-            </a:r>
-            <a:endParaRPr lang="en-US" sz="2000" dirty="0"/>
-          </a:p>
-          <a:p>
-            <a:pPr marL="342900" indent="-342900" algn="l">
-              <a:buFont typeface="Arial" panose="020B0604020202020204" pitchFamily="34" charset="0"/>
-              <a:buChar char="•"/>
-            </a:pPr>
-            <a:r>
-              <a:rPr lang="en-US" sz="2000" dirty="0"/>
-              <a:t>Better </a:t>
-            </a:r>
-            <a:r>
-              <a:rPr lang="en-US" sz="2000" b="1" dirty="0"/>
-              <a:t>scalability &amp; maintainability</a:t>
-            </a:r>
-            <a:endParaRPr lang="en-US" sz="2000" dirty="0"/>
-          </a:p>
-          <a:p>
-            <a:pPr lvl="0" algn="l" eaLnBrk="0" fontAlgn="base" hangingPunct="0">
-              <a:lnSpc>
-                <a:spcPct val="100000"/>
-              </a:lnSpc>
-              <a:spcBef>
-                <a:spcPct val="0"/>
-              </a:spcBef>
-              <a:spcAft>
-                <a:spcPct val="0"/>
-              </a:spcAft>
-            </a:pPr>
-            <a:endParaRPr lang="en-IN" sz="2000" b="1" dirty="0"/>
-          </a:p>
-          <a:p>
-            <a:pPr algn="l"/>
-            <a:endParaRPr lang="en-IN" sz="1600" dirty="0"/>
-          </a:p>
-        </p:txBody>
-      </p:sp>
+      <p:graphicFrame>
+        <p:nvGraphicFramePr>
+          <p:cNvPr id="7" name="Table 6">
+            <a:extLst>
+              <a:ext uri="{FF2B5EF4-FFF2-40B4-BE49-F238E27FC236}">
+                <a16:creationId xmlns:a16="http://schemas.microsoft.com/office/drawing/2014/main" id="{ED8BF6CE-200C-F222-A321-F9F352691332}"/>
+              </a:ext>
+            </a:extLst>
+          </p:cNvPr>
+          <p:cNvGraphicFramePr>
+            <a:graphicFrameLocks noGrp="1"/>
+          </p:cNvGraphicFramePr>
+          <p:nvPr>
+            <p:extLst>
+              <p:ext uri="{D42A27DB-BD31-4B8C-83A1-F6EECF244321}">
+                <p14:modId xmlns:p14="http://schemas.microsoft.com/office/powerpoint/2010/main" val="1005941400"/>
+              </p:ext>
+            </p:extLst>
+          </p:nvPr>
+        </p:nvGraphicFramePr>
+        <p:xfrm>
+          <a:off x="710184" y="1524338"/>
+          <a:ext cx="10614152" cy="3559724"/>
+        </p:xfrm>
+        <a:graphic>
+          <a:graphicData uri="http://schemas.openxmlformats.org/drawingml/2006/table">
+            <a:tbl>
+              <a:tblPr firstRow="1" bandRow="1">
+                <a:tableStyleId>{5C22544A-7EE6-4342-B048-85BDC9FD1C3A}</a:tableStyleId>
+              </a:tblPr>
+              <a:tblGrid>
+                <a:gridCol w="2896616">
+                  <a:extLst>
+                    <a:ext uri="{9D8B030D-6E8A-4147-A177-3AD203B41FA5}">
+                      <a16:colId xmlns:a16="http://schemas.microsoft.com/office/drawing/2014/main" val="2812890575"/>
+                    </a:ext>
+                  </a:extLst>
+                </a:gridCol>
+                <a:gridCol w="7717536">
+                  <a:extLst>
+                    <a:ext uri="{9D8B030D-6E8A-4147-A177-3AD203B41FA5}">
+                      <a16:colId xmlns:a16="http://schemas.microsoft.com/office/drawing/2014/main" val="648660649"/>
+                    </a:ext>
+                  </a:extLst>
+                </a:gridCol>
+              </a:tblGrid>
+              <a:tr h="508532">
+                <a:tc>
+                  <a:txBody>
+                    <a:bodyPr/>
+                    <a:lstStyle/>
+                    <a:p>
+                      <a:pPr>
+                        <a:buNone/>
+                      </a:pPr>
+                      <a:r>
+                        <a:rPr lang="en-IN" b="1" dirty="0"/>
+                        <a:t>Outcome Area</a:t>
+                      </a:r>
+                      <a:endParaRPr lang="en-IN" dirty="0"/>
+                    </a:p>
+                  </a:txBody>
+                  <a:tcPr anchor="ctr"/>
+                </a:tc>
+                <a:tc>
+                  <a:txBody>
+                    <a:bodyPr/>
+                    <a:lstStyle/>
+                    <a:p>
+                      <a:pPr>
+                        <a:buNone/>
+                      </a:pPr>
+                      <a:r>
+                        <a:rPr lang="en-IN" b="1"/>
+                        <a:t>Impact</a:t>
+                      </a:r>
+                      <a:endParaRPr lang="en-IN"/>
+                    </a:p>
+                  </a:txBody>
+                  <a:tcPr anchor="ctr"/>
+                </a:tc>
+                <a:extLst>
+                  <a:ext uri="{0D108BD9-81ED-4DB2-BD59-A6C34878D82A}">
+                    <a16:rowId xmlns:a16="http://schemas.microsoft.com/office/drawing/2014/main" val="1618732909"/>
+                  </a:ext>
+                </a:extLst>
+              </a:tr>
+              <a:tr h="508532">
+                <a:tc>
+                  <a:txBody>
+                    <a:bodyPr/>
+                    <a:lstStyle/>
+                    <a:p>
+                      <a:pPr>
+                        <a:buNone/>
+                      </a:pPr>
+                      <a:r>
+                        <a:rPr lang="en-IN" b="1" dirty="0"/>
+                        <a:t>Environment Isolation</a:t>
+                      </a:r>
+                      <a:endParaRPr lang="en-IN" dirty="0"/>
+                    </a:p>
+                  </a:txBody>
+                  <a:tcPr anchor="ctr"/>
+                </a:tc>
+                <a:tc>
+                  <a:txBody>
+                    <a:bodyPr/>
+                    <a:lstStyle/>
+                    <a:p>
+                      <a:pPr>
+                        <a:buNone/>
+                      </a:pPr>
+                      <a:r>
+                        <a:rPr lang="en-US"/>
+                        <a:t>Strong separation using </a:t>
+                      </a:r>
+                      <a:r>
+                        <a:rPr lang="en-US" b="1"/>
+                        <a:t>AWS multi-account architecture</a:t>
+                      </a:r>
+                      <a:endParaRPr lang="en-US"/>
+                    </a:p>
+                  </a:txBody>
+                  <a:tcPr anchor="ctr"/>
+                </a:tc>
+                <a:extLst>
+                  <a:ext uri="{0D108BD9-81ED-4DB2-BD59-A6C34878D82A}">
+                    <a16:rowId xmlns:a16="http://schemas.microsoft.com/office/drawing/2014/main" val="4266283373"/>
+                  </a:ext>
+                </a:extLst>
+              </a:tr>
+              <a:tr h="508532">
+                <a:tc>
+                  <a:txBody>
+                    <a:bodyPr/>
+                    <a:lstStyle/>
+                    <a:p>
+                      <a:pPr>
+                        <a:buNone/>
+                      </a:pPr>
+                      <a:r>
+                        <a:rPr lang="en-IN" b="1"/>
+                        <a:t>Security &amp; Governance</a:t>
+                      </a:r>
+                      <a:endParaRPr lang="en-IN"/>
+                    </a:p>
+                  </a:txBody>
+                  <a:tcPr anchor="ctr"/>
+                </a:tc>
+                <a:tc>
+                  <a:txBody>
+                    <a:bodyPr/>
+                    <a:lstStyle/>
+                    <a:p>
+                      <a:pPr>
+                        <a:buNone/>
+                      </a:pPr>
+                      <a:r>
+                        <a:rPr lang="en-US"/>
+                        <a:t>Improved via </a:t>
+                      </a:r>
+                      <a:r>
+                        <a:rPr lang="en-US" b="1"/>
+                        <a:t>account-level segregation &amp; controlled approvals</a:t>
+                      </a:r>
+                      <a:endParaRPr lang="en-US"/>
+                    </a:p>
+                  </a:txBody>
+                  <a:tcPr anchor="ctr"/>
+                </a:tc>
+                <a:extLst>
+                  <a:ext uri="{0D108BD9-81ED-4DB2-BD59-A6C34878D82A}">
+                    <a16:rowId xmlns:a16="http://schemas.microsoft.com/office/drawing/2014/main" val="3947332291"/>
+                  </a:ext>
+                </a:extLst>
+              </a:tr>
+              <a:tr h="508532">
+                <a:tc>
+                  <a:txBody>
+                    <a:bodyPr/>
+                    <a:lstStyle/>
+                    <a:p>
+                      <a:pPr>
+                        <a:buNone/>
+                      </a:pPr>
+                      <a:r>
+                        <a:rPr lang="en-IN" b="1"/>
+                        <a:t>Deployment Reliability</a:t>
+                      </a:r>
+                      <a:endParaRPr lang="en-IN"/>
+                    </a:p>
+                  </a:txBody>
+                  <a:tcPr anchor="ctr"/>
+                </a:tc>
+                <a:tc>
+                  <a:txBody>
+                    <a:bodyPr/>
+                    <a:lstStyle/>
+                    <a:p>
+                      <a:pPr>
+                        <a:buNone/>
+                      </a:pPr>
+                      <a:r>
+                        <a:rPr lang="en-IN" b="1"/>
+                        <a:t>Standardized &amp; repeatable deployments</a:t>
+                      </a:r>
+                      <a:r>
+                        <a:rPr lang="en-IN"/>
+                        <a:t> via CI/CD</a:t>
+                      </a:r>
+                    </a:p>
+                  </a:txBody>
+                  <a:tcPr anchor="ctr"/>
+                </a:tc>
+                <a:extLst>
+                  <a:ext uri="{0D108BD9-81ED-4DB2-BD59-A6C34878D82A}">
+                    <a16:rowId xmlns:a16="http://schemas.microsoft.com/office/drawing/2014/main" val="1562415300"/>
+                  </a:ext>
+                </a:extLst>
+              </a:tr>
+              <a:tr h="508532">
+                <a:tc>
+                  <a:txBody>
+                    <a:bodyPr/>
+                    <a:lstStyle/>
+                    <a:p>
+                      <a:pPr>
+                        <a:buNone/>
+                      </a:pPr>
+                      <a:r>
+                        <a:rPr lang="en-IN" b="1"/>
+                        <a:t>Risk Reduction</a:t>
+                      </a:r>
+                      <a:endParaRPr lang="en-IN"/>
+                    </a:p>
+                  </a:txBody>
+                  <a:tcPr anchor="ctr"/>
+                </a:tc>
+                <a:tc>
+                  <a:txBody>
+                    <a:bodyPr/>
+                    <a:lstStyle/>
+                    <a:p>
+                      <a:pPr>
+                        <a:buNone/>
+                      </a:pPr>
+                      <a:r>
+                        <a:rPr lang="en-US"/>
+                        <a:t>Lower risk due to </a:t>
+                      </a:r>
+                      <a:r>
+                        <a:rPr lang="en-US" b="1"/>
+                        <a:t>automated testing + staged promotion</a:t>
+                      </a:r>
+                      <a:endParaRPr lang="en-US"/>
+                    </a:p>
+                  </a:txBody>
+                  <a:tcPr anchor="ctr"/>
+                </a:tc>
+                <a:extLst>
+                  <a:ext uri="{0D108BD9-81ED-4DB2-BD59-A6C34878D82A}">
+                    <a16:rowId xmlns:a16="http://schemas.microsoft.com/office/drawing/2014/main" val="264727082"/>
+                  </a:ext>
+                </a:extLst>
+              </a:tr>
+              <a:tr h="508532">
+                <a:tc>
+                  <a:txBody>
+                    <a:bodyPr/>
+                    <a:lstStyle/>
+                    <a:p>
+                      <a:pPr>
+                        <a:buNone/>
+                      </a:pPr>
+                      <a:r>
+                        <a:rPr lang="en-IN" b="1"/>
+                        <a:t>Scalability</a:t>
+                      </a:r>
+                      <a:endParaRPr lang="en-IN"/>
+                    </a:p>
+                  </a:txBody>
+                  <a:tcPr anchor="ctr"/>
+                </a:tc>
+                <a:tc>
+                  <a:txBody>
+                    <a:bodyPr/>
+                    <a:lstStyle/>
+                    <a:p>
+                      <a:pPr>
+                        <a:buNone/>
+                      </a:pPr>
+                      <a:r>
+                        <a:rPr lang="en-US" dirty="0"/>
+                        <a:t>Platform is now </a:t>
+                      </a:r>
+                      <a:r>
+                        <a:rPr lang="en-US" b="1" dirty="0"/>
+                        <a:t>ready to scale across multiple ML/AI/DS use cases</a:t>
+                      </a:r>
+                      <a:endParaRPr lang="en-US" dirty="0"/>
+                    </a:p>
+                  </a:txBody>
+                  <a:tcPr anchor="ctr"/>
+                </a:tc>
+                <a:extLst>
+                  <a:ext uri="{0D108BD9-81ED-4DB2-BD59-A6C34878D82A}">
+                    <a16:rowId xmlns:a16="http://schemas.microsoft.com/office/drawing/2014/main" val="2428494171"/>
+                  </a:ext>
+                </a:extLst>
+              </a:tr>
+              <a:tr h="508532">
+                <a:tc>
+                  <a:txBody>
+                    <a:bodyPr/>
+                    <a:lstStyle/>
+                    <a:p>
+                      <a:pPr>
+                        <a:buNone/>
+                      </a:pPr>
+                      <a:r>
+                        <a:rPr lang="en-IN" b="1"/>
+                        <a:t>Operational Efficiency</a:t>
+                      </a:r>
+                      <a:endParaRPr lang="en-IN"/>
+                    </a:p>
+                  </a:txBody>
+                  <a:tcPr anchor="ctr"/>
+                </a:tc>
+                <a:tc>
+                  <a:txBody>
+                    <a:bodyPr/>
+                    <a:lstStyle/>
+                    <a:p>
+                      <a:pPr>
+                        <a:buNone/>
+                      </a:pPr>
+                      <a:r>
+                        <a:rPr lang="en-US" dirty="0"/>
+                        <a:t>Reduced manual effort and improved </a:t>
+                      </a:r>
+                      <a:r>
+                        <a:rPr lang="en-US" b="1" dirty="0"/>
+                        <a:t>team productivity</a:t>
+                      </a:r>
+                      <a:endParaRPr lang="en-US" dirty="0"/>
+                    </a:p>
+                  </a:txBody>
+                  <a:tcPr anchor="ctr"/>
+                </a:tc>
+                <a:extLst>
+                  <a:ext uri="{0D108BD9-81ED-4DB2-BD59-A6C34878D82A}">
+                    <a16:rowId xmlns:a16="http://schemas.microsoft.com/office/drawing/2014/main" val="1249422862"/>
+                  </a:ext>
+                </a:extLst>
+              </a:tr>
+            </a:tbl>
+          </a:graphicData>
+        </a:graphic>
+      </p:graphicFrame>
     </p:spTree>
     <p:extLst>
       <p:ext uri="{BB962C8B-B14F-4D97-AF65-F5344CB8AC3E}">
